--- a/cursos/recursos/formacion-ajedrez/05-resolucion-de-casos-en-grupos.pptx
+++ b/cursos/recursos/formacion-ajedrez/05-resolucion-de-casos-en-grupos.pptx
@@ -4052,7 +4052,7 @@
       <p:grpSpPr/>
       <p:pic>
         <p:nvPicPr>
-          <p:cNvPr id="2" name="Lámina 13" descr="Caso 2, decisión: El encuentro directo no los separa. Se calcula el Sonneborn-Berger de cada uno (ver el ejemplo de la sesión 3) y, si siguen empatados, el número de victorias. Si todo se agota, sorteo, salvo que las bases digan otra cosa."/>
+          <p:cNvPr id="2" name="Lámina 13" descr="Caso 2, decisión: El encuentro directo no los separa. Se calcula el Sonneborn-Berger de cada uno (ver el ejemplo de la sesión 3) y, si siguen empatados, el número de victorias. Para la próxima vez: como el primer lugar da el título, conviene que las bases fijen antes un desempate jugado (dos rápidas y, si hace falta, un armagedón)."/>
           <p:cNvPicPr>
             <a:picLocks noChangeAspect="1"/>
           </p:cNvPicPr>
